--- a/CHAPTER 5 Cognitive Architectures with LangGraph.pptx
+++ b/CHAPTER 5 Cognitive Architectures with LangGraph.pptx
@@ -3212,14 +3212,378 @@
         </p:blipFill>
         <p:spPr>
           <a:xfrm>
-            <a:off x="2449514" y="1653341"/>
-            <a:ext cx="7292972" cy="4580017"/>
+            <a:off x="5790965" y="2311422"/>
+            <a:ext cx="5893826" cy="3701348"/>
           </a:xfrm>
           <a:prstGeom prst="rect">
             <a:avLst/>
           </a:prstGeom>
         </p:spPr>
       </p:pic>
+      <p:sp>
+        <p:nvSpPr>
+          <p:cNvPr id="7" name="TextBox 6">
+            <a:extLst>
+              <a:ext uri="{FF2B5EF4-FFF2-40B4-BE49-F238E27FC236}">
+                <a16:creationId xmlns:a16="http://schemas.microsoft.com/office/drawing/2014/main" id="{623EECA5-1502-1478-CDFC-E7F012261DDE}"/>
+              </a:ext>
+            </a:extLst>
+          </p:cNvPr>
+          <p:cNvSpPr txBox="1"/>
+          <p:nvPr/>
+        </p:nvSpPr>
+        <p:spPr>
+          <a:xfrm>
+            <a:off x="600074" y="1248422"/>
+            <a:ext cx="10963275" cy="793166"/>
+          </a:xfrm>
+          <a:prstGeom prst="rect">
+            <a:avLst/>
+          </a:prstGeom>
+          <a:noFill/>
+        </p:spPr>
+        <p:txBody>
+          <a:bodyPr wrap="square">
+            <a:spAutoFit/>
+          </a:bodyPr>
+          <a:lstStyle/>
+          <a:p>
+            <a:pPr>
+              <a:lnSpc>
+                <a:spcPct val="150000"/>
+              </a:lnSpc>
+            </a:pPr>
+            <a:r>
+              <a:rPr lang="ko-KR" altLang="en-US" sz="1600" dirty="0">
+                <a:latin typeface="D2Coding" panose="020B0609020101020101" pitchFamily="49" charset="-127"/>
+                <a:ea typeface="D2Coding" panose="020B0609020101020101" pitchFamily="49" charset="-127"/>
+              </a:rPr>
+              <a:t>체인</a:t>
+            </a:r>
+            <a:r>
+              <a:rPr lang="en-US" altLang="ko-KR" sz="1600" dirty="0">
+                <a:latin typeface="D2Coding" panose="020B0609020101020101" pitchFamily="49" charset="-127"/>
+                <a:ea typeface="D2Coding" panose="020B0609020101020101" pitchFamily="49" charset="-127"/>
+              </a:rPr>
+              <a:t>(Chain) </a:t>
+            </a:r>
+            <a:r>
+              <a:rPr lang="ko-KR" altLang="en-US" sz="1600" dirty="0">
+                <a:latin typeface="D2Coding" panose="020B0609020101020101" pitchFamily="49" charset="-127"/>
+                <a:ea typeface="D2Coding" panose="020B0609020101020101" pitchFamily="49" charset="-127"/>
+              </a:rPr>
+              <a:t>아키텍처가 </a:t>
+            </a:r>
+            <a:r>
+              <a:rPr lang="en-US" altLang="ko-KR" sz="1600" dirty="0">
+                <a:latin typeface="D2Coding" panose="020B0609020101020101" pitchFamily="49" charset="-127"/>
+                <a:ea typeface="D2Coding" panose="020B0609020101020101" pitchFamily="49" charset="-127"/>
+              </a:rPr>
+              <a:t>(</a:t>
+            </a:r>
+            <a:r>
+              <a:rPr lang="ko-KR" altLang="en-US" sz="1600" dirty="0">
+                <a:latin typeface="D2Coding" panose="020B0609020101020101" pitchFamily="49" charset="-127"/>
+                <a:ea typeface="D2Coding" panose="020B0609020101020101" pitchFamily="49" charset="-127"/>
+              </a:rPr>
+              <a:t>단계가 몇 개든 상관없이</a:t>
+            </a:r>
+            <a:r>
+              <a:rPr lang="en-US" altLang="ko-KR" sz="1600" dirty="0">
+                <a:latin typeface="D2Coding" panose="020B0609020101020101" pitchFamily="49" charset="-127"/>
+                <a:ea typeface="D2Coding" panose="020B0609020101020101" pitchFamily="49" charset="-127"/>
+              </a:rPr>
+              <a:t>) </a:t>
+            </a:r>
+            <a:r>
+              <a:rPr lang="ko-KR" altLang="en-US" sz="1600" dirty="0">
+                <a:latin typeface="D2Coding" panose="020B0609020101020101" pitchFamily="49" charset="-127"/>
+                <a:ea typeface="D2Coding" panose="020B0609020101020101" pitchFamily="49" charset="-127"/>
+              </a:rPr>
+              <a:t>항상 정적인 순서대로 단계를 실행하는 반면</a:t>
+            </a:r>
+            <a:r>
+              <a:rPr lang="en-US" altLang="ko-KR" sz="1600" dirty="0">
+                <a:latin typeface="D2Coding" panose="020B0609020101020101" pitchFamily="49" charset="-127"/>
+                <a:ea typeface="D2Coding" panose="020B0609020101020101" pitchFamily="49" charset="-127"/>
+              </a:rPr>
+              <a:t>, </a:t>
+            </a:r>
+            <a:r>
+              <a:rPr lang="ko-KR" altLang="en-US" sz="1600" dirty="0">
+                <a:latin typeface="D2Coding" panose="020B0609020101020101" pitchFamily="49" charset="-127"/>
+                <a:ea typeface="D2Coding" panose="020B0609020101020101" pitchFamily="49" charset="-127"/>
+              </a:rPr>
+              <a:t>라우터</a:t>
+            </a:r>
+            <a:r>
+              <a:rPr lang="en-US" altLang="ko-KR" sz="1600" dirty="0">
+                <a:latin typeface="D2Coding" panose="020B0609020101020101" pitchFamily="49" charset="-127"/>
+                <a:ea typeface="D2Coding" panose="020B0609020101020101" pitchFamily="49" charset="-127"/>
+              </a:rPr>
+              <a:t>(Router) </a:t>
+            </a:r>
+            <a:r>
+              <a:rPr lang="ko-KR" altLang="en-US" sz="1600" dirty="0">
+                <a:latin typeface="D2Coding" panose="020B0609020101020101" pitchFamily="49" charset="-127"/>
+                <a:ea typeface="D2Coding" panose="020B0609020101020101" pitchFamily="49" charset="-127"/>
+              </a:rPr>
+              <a:t>아키텍처는 미리 정의된 특정 단계들 중에서 최적의 단계를 선택하는 데 </a:t>
+            </a:r>
+            <a:r>
+              <a:rPr lang="en-US" altLang="ko-KR" sz="1600" dirty="0">
+                <a:latin typeface="D2Coding" panose="020B0609020101020101" pitchFamily="49" charset="-127"/>
+                <a:ea typeface="D2Coding" panose="020B0609020101020101" pitchFamily="49" charset="-127"/>
+              </a:rPr>
+              <a:t>LLM</a:t>
+            </a:r>
+            <a:r>
+              <a:rPr lang="ko-KR" altLang="en-US" sz="1600" dirty="0">
+                <a:latin typeface="D2Coding" panose="020B0609020101020101" pitchFamily="49" charset="-127"/>
+                <a:ea typeface="D2Coding" panose="020B0609020101020101" pitchFamily="49" charset="-127"/>
+              </a:rPr>
+              <a:t>을 활용하는 것</a:t>
+            </a:r>
+          </a:p>
+        </p:txBody>
+      </p:sp>
+      <p:sp>
+        <p:nvSpPr>
+          <p:cNvPr id="10" name="TextBox 9">
+            <a:extLst>
+              <a:ext uri="{FF2B5EF4-FFF2-40B4-BE49-F238E27FC236}">
+                <a16:creationId xmlns:a16="http://schemas.microsoft.com/office/drawing/2014/main" id="{149B239E-067E-62BD-89CB-B5A09558BA45}"/>
+              </a:ext>
+            </a:extLst>
+          </p:cNvPr>
+          <p:cNvSpPr txBox="1"/>
+          <p:nvPr/>
+        </p:nvSpPr>
+        <p:spPr>
+          <a:xfrm>
+            <a:off x="585785" y="2311422"/>
+            <a:ext cx="5057932" cy="3754874"/>
+          </a:xfrm>
+          <a:prstGeom prst="rect">
+            <a:avLst/>
+          </a:prstGeom>
+          <a:noFill/>
+        </p:spPr>
+        <p:txBody>
+          <a:bodyPr wrap="square">
+            <a:spAutoFit/>
+          </a:bodyPr>
+          <a:lstStyle/>
+          <a:p>
+            <a:pPr marL="342900" indent="-342900">
+              <a:buFont typeface="+mj-lt"/>
+              <a:buAutoNum type="arabicPeriod"/>
+            </a:pPr>
+            <a:r>
+              <a:rPr lang="ko-KR" altLang="en-US" sz="1400" dirty="0" err="1">
+                <a:latin typeface="D2Coding" panose="020B0609020101020101" pitchFamily="49" charset="-127"/>
+                <a:ea typeface="D2Coding" panose="020B0609020101020101" pitchFamily="49" charset="-127"/>
+              </a:rPr>
+              <a:t>router</a:t>
+            </a:r>
+            <a:r>
+              <a:rPr lang="ko-KR" altLang="en-US" sz="1400" dirty="0">
+                <a:latin typeface="D2Coding" panose="020B0609020101020101" pitchFamily="49" charset="-127"/>
+                <a:ea typeface="D2Coding" panose="020B0609020101020101" pitchFamily="49" charset="-127"/>
+              </a:rPr>
+              <a:t> 노드: </a:t>
+            </a:r>
+            <a:r>
+              <a:rPr lang="ko-KR" altLang="en-US" sz="1400" dirty="0" err="1">
+                <a:latin typeface="D2Coding" panose="020B0609020101020101" pitchFamily="49" charset="-127"/>
+                <a:ea typeface="D2Coding" panose="020B0609020101020101" pitchFamily="49" charset="-127"/>
+              </a:rPr>
+              <a:t>messages에</a:t>
+            </a:r>
+            <a:r>
+              <a:rPr lang="ko-KR" altLang="en-US" sz="1400" dirty="0">
+                <a:latin typeface="D2Coding" panose="020B0609020101020101" pitchFamily="49" charset="-127"/>
+                <a:ea typeface="D2Coding" panose="020B0609020101020101" pitchFamily="49" charset="-127"/>
+              </a:rPr>
+              <a:t> 대한 업데이트(앞서 설명한 메모리 기법을 사용하여 대화를 쉽게 이어갈 수 있게 해 줌)와 함께, 사용자의 질문에 대해 </a:t>
+            </a:r>
+            <a:r>
+              <a:rPr lang="ko-KR" altLang="en-US" sz="1400" dirty="0" err="1">
+                <a:latin typeface="D2Coding" panose="020B0609020101020101" pitchFamily="49" charset="-127"/>
+                <a:ea typeface="D2Coding" panose="020B0609020101020101" pitchFamily="49" charset="-127"/>
+              </a:rPr>
+              <a:t>LLM이</a:t>
+            </a:r>
+            <a:r>
+              <a:rPr lang="ko-KR" altLang="en-US" sz="1400" dirty="0">
+                <a:latin typeface="D2Coding" panose="020B0609020101020101" pitchFamily="49" charset="-127"/>
+                <a:ea typeface="D2Coding" panose="020B0609020101020101" pitchFamily="49" charset="-127"/>
+              </a:rPr>
+              <a:t> 선택한 도메인(이 경우 </a:t>
+            </a:r>
+            <a:r>
+              <a:rPr lang="ko-KR" altLang="en-US" sz="1400" dirty="0" err="1">
+                <a:latin typeface="D2Coding" panose="020B0609020101020101" pitchFamily="49" charset="-127"/>
+                <a:ea typeface="D2Coding" panose="020B0609020101020101" pitchFamily="49" charset="-127"/>
+              </a:rPr>
+              <a:t>insurance</a:t>
+            </a:r>
+            <a:r>
+              <a:rPr lang="ko-KR" altLang="en-US" sz="1400" dirty="0">
+                <a:latin typeface="D2Coding" panose="020B0609020101020101" pitchFamily="49" charset="-127"/>
+                <a:ea typeface="D2Coding" panose="020B0609020101020101" pitchFamily="49" charset="-127"/>
+              </a:rPr>
+              <a:t>)을 반환</a:t>
+            </a:r>
+          </a:p>
+          <a:p>
+            <a:pPr marL="342900" indent="-342900">
+              <a:buFont typeface="+mj-lt"/>
+              <a:buAutoNum type="arabicPeriod"/>
+            </a:pPr>
+            <a:endParaRPr lang="ko-KR" altLang="en-US" sz="1400" dirty="0">
+              <a:latin typeface="D2Coding" panose="020B0609020101020101" pitchFamily="49" charset="-127"/>
+              <a:ea typeface="D2Coding" panose="020B0609020101020101" pitchFamily="49" charset="-127"/>
+            </a:endParaRPr>
+          </a:p>
+          <a:p>
+            <a:pPr marL="342900" indent="-342900">
+              <a:buFont typeface="+mj-lt"/>
+              <a:buAutoNum type="arabicPeriod"/>
+            </a:pPr>
+            <a:r>
+              <a:rPr lang="ko-KR" altLang="en-US" sz="1400" dirty="0" err="1">
+                <a:latin typeface="D2Coding" panose="020B0609020101020101" pitchFamily="49" charset="-127"/>
+                <a:ea typeface="D2Coding" panose="020B0609020101020101" pitchFamily="49" charset="-127"/>
+              </a:rPr>
+              <a:t>pick_retriever</a:t>
+            </a:r>
+            <a:r>
+              <a:rPr lang="ko-KR" altLang="en-US" sz="1400" dirty="0">
+                <a:latin typeface="D2Coding" panose="020B0609020101020101" pitchFamily="49" charset="-127"/>
+                <a:ea typeface="D2Coding" panose="020B0609020101020101" pitchFamily="49" charset="-127"/>
+              </a:rPr>
+              <a:t> 함수: 이전 단계의 LLM 호출에서 식별된 도메인을 바탕으로 실행할 다음 노드의 이름을 반환</a:t>
+            </a:r>
+          </a:p>
+          <a:p>
+            <a:pPr marL="342900" indent="-342900">
+              <a:buFont typeface="+mj-lt"/>
+              <a:buAutoNum type="arabicPeriod"/>
+            </a:pPr>
+            <a:endParaRPr lang="ko-KR" altLang="en-US" sz="1400" dirty="0">
+              <a:latin typeface="D2Coding" panose="020B0609020101020101" pitchFamily="49" charset="-127"/>
+              <a:ea typeface="D2Coding" panose="020B0609020101020101" pitchFamily="49" charset="-127"/>
+            </a:endParaRPr>
+          </a:p>
+          <a:p>
+            <a:pPr marL="342900" indent="-342900">
+              <a:buFont typeface="+mj-lt"/>
+              <a:buAutoNum type="arabicPeriod"/>
+            </a:pPr>
+            <a:r>
+              <a:rPr lang="ko-KR" altLang="en-US" sz="1400" dirty="0" err="1">
+                <a:latin typeface="D2Coding" panose="020B0609020101020101" pitchFamily="49" charset="-127"/>
+                <a:ea typeface="D2Coding" panose="020B0609020101020101" pitchFamily="49" charset="-127"/>
+              </a:rPr>
+              <a:t>retrieve_insurance_faqs</a:t>
+            </a:r>
+            <a:r>
+              <a:rPr lang="ko-KR" altLang="en-US" sz="1400" dirty="0">
+                <a:latin typeface="D2Coding" panose="020B0609020101020101" pitchFamily="49" charset="-127"/>
+                <a:ea typeface="D2Coding" panose="020B0609020101020101" pitchFamily="49" charset="-127"/>
+              </a:rPr>
+              <a:t> 노드: 해당 인덱스에서 관련 문서 집합을 반환했습니다. 이는 앞서 본 그래프 그림에서 </a:t>
+            </a:r>
+            <a:r>
+              <a:rPr lang="ko-KR" altLang="en-US" sz="1400" dirty="0" err="1">
+                <a:latin typeface="D2Coding" panose="020B0609020101020101" pitchFamily="49" charset="-127"/>
+                <a:ea typeface="D2Coding" panose="020B0609020101020101" pitchFamily="49" charset="-127"/>
+              </a:rPr>
+              <a:t>LLM의</a:t>
+            </a:r>
+            <a:r>
+              <a:rPr lang="ko-KR" altLang="en-US" sz="1400" dirty="0">
+                <a:latin typeface="D2Coding" panose="020B0609020101020101" pitchFamily="49" charset="-127"/>
+                <a:ea typeface="D2Coding" panose="020B0609020101020101" pitchFamily="49" charset="-127"/>
+              </a:rPr>
+              <a:t> 판단에 따라 왼쪽 경로를 택함</a:t>
+            </a:r>
+          </a:p>
+          <a:p>
+            <a:pPr marL="342900" indent="-342900">
+              <a:buFont typeface="+mj-lt"/>
+              <a:buAutoNum type="arabicPeriod"/>
+            </a:pPr>
+            <a:endParaRPr lang="ko-KR" altLang="en-US" sz="1400" dirty="0">
+              <a:latin typeface="D2Coding" panose="020B0609020101020101" pitchFamily="49" charset="-127"/>
+              <a:ea typeface="D2Coding" panose="020B0609020101020101" pitchFamily="49" charset="-127"/>
+            </a:endParaRPr>
+          </a:p>
+          <a:p>
+            <a:pPr marL="342900" indent="-342900">
+              <a:buFont typeface="+mj-lt"/>
+              <a:buAutoNum type="arabicPeriod"/>
+            </a:pPr>
+            <a:r>
+              <a:rPr lang="ko-KR" altLang="en-US" sz="1400" dirty="0" err="1">
+                <a:latin typeface="D2Coding" panose="020B0609020101020101" pitchFamily="49" charset="-127"/>
+                <a:ea typeface="D2Coding" panose="020B0609020101020101" pitchFamily="49" charset="-127"/>
+              </a:rPr>
+              <a:t>generate_answer</a:t>
+            </a:r>
+            <a:r>
+              <a:rPr lang="ko-KR" altLang="en-US" sz="1400" dirty="0">
+                <a:latin typeface="D2Coding" panose="020B0609020101020101" pitchFamily="49" charset="-127"/>
+                <a:ea typeface="D2Coding" panose="020B0609020101020101" pitchFamily="49" charset="-127"/>
+              </a:rPr>
+              <a:t> 노드: 추출된 문서들과 원래의 사용자 질문을 바탕으로 최종 답변을 생성하였으며, 이 답변은 (</a:t>
+            </a:r>
+            <a:r>
+              <a:rPr lang="ko-KR" altLang="en-US" sz="1400" dirty="0" err="1">
+                <a:latin typeface="D2Coding" panose="020B0609020101020101" pitchFamily="49" charset="-127"/>
+                <a:ea typeface="D2Coding" panose="020B0609020101020101" pitchFamily="49" charset="-127"/>
+              </a:rPr>
+              <a:t>messages</a:t>
+            </a:r>
+            <a:r>
+              <a:rPr lang="ko-KR" altLang="en-US" sz="1400" dirty="0">
+                <a:latin typeface="D2Coding" panose="020B0609020101020101" pitchFamily="49" charset="-127"/>
+                <a:ea typeface="D2Coding" panose="020B0609020101020101" pitchFamily="49" charset="-127"/>
+              </a:rPr>
+              <a:t> 키의 최종 업데이트와 함께) 상태(</a:t>
+            </a:r>
+            <a:r>
+              <a:rPr lang="ko-KR" altLang="en-US" sz="1400" dirty="0" err="1">
+                <a:latin typeface="D2Coding" panose="020B0609020101020101" pitchFamily="49" charset="-127"/>
+                <a:ea typeface="D2Coding" panose="020B0609020101020101" pitchFamily="49" charset="-127"/>
+              </a:rPr>
+              <a:t>state</a:t>
+            </a:r>
+            <a:r>
+              <a:rPr lang="ko-KR" altLang="en-US" sz="1400" dirty="0">
+                <a:latin typeface="D2Coding" panose="020B0609020101020101" pitchFamily="49" charset="-127"/>
+                <a:ea typeface="D2Coding" panose="020B0609020101020101" pitchFamily="49" charset="-127"/>
+              </a:rPr>
+              <a:t>)</a:t>
+            </a:r>
+            <a:r>
+              <a:rPr lang="ko-KR" altLang="en-US" sz="1400" dirty="0" err="1">
+                <a:latin typeface="D2Coding" panose="020B0609020101020101" pitchFamily="49" charset="-127"/>
+                <a:ea typeface="D2Coding" panose="020B0609020101020101" pitchFamily="49" charset="-127"/>
+              </a:rPr>
+              <a:t>에</a:t>
+            </a:r>
+            <a:r>
+              <a:rPr lang="ko-KR" altLang="en-US" sz="1400" dirty="0">
+                <a:latin typeface="D2Coding" panose="020B0609020101020101" pitchFamily="49" charset="-127"/>
+                <a:ea typeface="D2Coding" panose="020B0609020101020101" pitchFamily="49" charset="-127"/>
+              </a:rPr>
+              <a:t> 저장</a:t>
+            </a:r>
+          </a:p>
+        </p:txBody>
+      </p:sp>
     </p:spTree>
     <p:extLst>
       <p:ext uri="{BB962C8B-B14F-4D97-AF65-F5344CB8AC3E}">
